--- a/units/unit06_timing/timing.pptx
+++ b/units/unit06_timing/timing.pptx
@@ -4104,7 +4104,7 @@
           <a:p>
             <a:r>
               <a:rPr lang="en-US"/>
-              <a:t>EL-GY 9463:  Introduction to Hardware Design</a:t>
+              <a:t>ECE-GY 6463:  Advanced Hardware Design</a:t>
             </a:r>
           </a:p>
           <a:p>

--- a/units/unit06_timing/timing.pptx
+++ b/units/unit06_timing/timing.pptx
@@ -72,6 +72,7 @@
     <p:sldId id="322" r:id="rId58"/>
     <p:sldId id="323" r:id="rId59"/>
     <p:sldId id="324" r:id="rId60"/>
+    <p:sldId id="383" r:id="rId80"/>
     <p:sldId id="372" r:id="rId61"/>
     <p:sldId id="317" r:id="rId62"/>
     <p:sldId id="318" r:id="rId63"/>
@@ -33479,6 +33480,489 @@
 </p:sld>
 </file>
 
+<file path=ppt/slides/slide74.xml><?xml version="1.0" encoding="utf-8"?>
+<p:sld xmlns:a="http://schemas.openxmlformats.org/drawingml/2006/main" xmlns:r="http://schemas.openxmlformats.org/officeDocument/2006/relationships" xmlns:p="http://schemas.openxmlformats.org/presentationml/2006/main">
+  <p:cSld>
+    <p:spTree>
+      <p:nvGrpSpPr>
+        <p:cNvPr id="1" name=""/>
+        <p:cNvGrpSpPr/>
+        <p:nvPr/>
+      </p:nvGrpSpPr>
+      <p:grpSpPr>
+        <a:xfrm>
+          <a:off x="0" y="0"/>
+          <a:ext cx="0" cy="0"/>
+          <a:chOff x="0" y="0"/>
+          <a:chExt cx="0" cy="0"/>
+        </a:xfrm>
+      </p:grpSpPr>
+      <p:sp>
+        <p:nvSpPr>
+          <p:cNvPr id="2" name="Title 2"/>
+          <p:cNvSpPr>
+            <a:spLocks noGrp="1"/>
+          </p:cNvSpPr>
+          <p:nvPr>
+            <p:ph type="title"/>
+          </p:nvPr>
+        </p:nvSpPr>
+        <p:spPr/>
+        <p:txBody>
+          <a:bodyPr/>
+          <a:lstStyle/>
+          <a:p>
+            <a:r>
+              <a:rPr lang="en-US" dirty="0"/>
+              <a:t>The Demo: Latency and the Clock</a:t>
+            </a:r>
+          </a:p>
+        </p:txBody>
+      </p:sp>
+      <p:sp>
+        <p:nvSpPr>
+          <p:cNvPr id="3" name="Shape 3"/>
+          <p:cNvSpPr/>
+          <p:nvPr/>
+        </p:nvSpPr>
+        <p:spPr>
+          <a:xfrm>
+            <a:off x="685800" y="1335024"/>
+            <a:ext cx="10789920" cy="694944"/>
+          </a:xfrm>
+          <a:prstGeom prst="roundRect">
+            <a:avLst>
+              <a:gd name="adj" fmla="val 16000"/>
+            </a:avLst>
+          </a:prstGeom>
+          <a:solidFill>
+            <a:srgbClr val="57068C"/>
+          </a:solidFill>
+          <a:ln>
+            <a:noFill/>
+          </a:ln>
+        </p:spPr>
+        <p:txBody>
+          <a:bodyPr wrap="square" lIns="54864" tIns="27432" rIns="54864" bIns="27432" anchor="ctr" rtlCol="0">
+            <a:noAutofit/>
+          </a:bodyPr>
+          <a:lstStyle/>
+          <a:p>
+            <a:pPr algn="ctr"/>
+            <a:r>
+              <a:rPr lang="en-US" sz="1800" b="1" dirty="0">
+                <a:solidFill>
+                  <a:srgbClr val="FFFFFF"/>
+                </a:solidFill>
+              </a:rPr>
+              <a:t xml:space="preserve">sdrangan.github.io/hwdesign   —   Demos › Timing and the Clock</a:t>
+            </a:r>
+            <a:endParaRPr lang="en-US" sz="1800" dirty="0"/>
+          </a:p>
+        </p:txBody>
+      </p:sp>
+      <p:sp>
+        <p:nvSpPr>
+          <p:cNvPr id="4" name="TextBox 4"/>
+          <p:cNvSpPr txBox="1"/>
+          <p:nvPr/>
+        </p:nvSpPr>
+        <p:spPr>
+          <a:xfrm>
+            <a:off x="685800" y="2212848"/>
+            <a:ext cx="5120640" cy="274320"/>
+          </a:xfrm>
+          <a:prstGeom prst="rect">
+            <a:avLst/>
+          </a:prstGeom>
+          <a:noFill/>
+        </p:spPr>
+        <p:txBody>
+          <a:bodyPr wrap="square" lIns="0" tIns="0" rIns="0" bIns="0" anchor="t" rtlCol="0">
+            <a:noAutofit/>
+          </a:bodyPr>
+          <a:lstStyle/>
+          <a:p>
+            <a:r>
+              <a:rPr lang="en-US" sz="1200" b="1" dirty="0">
+                <a:solidFill>
+                  <a:srgbClr val="6E6E6E"/>
+                </a:solidFill>
+              </a:rPr>
+              <a:t>RUN THE SWEEP</a:t>
+            </a:r>
+            <a:endParaRPr lang="en-US" sz="1200" dirty="0"/>
+          </a:p>
+        </p:txBody>
+      </p:sp>
+      <p:sp>
+        <p:nvSpPr>
+          <p:cNvPr id="5" name="Shape 5"/>
+          <p:cNvSpPr/>
+          <p:nvPr/>
+        </p:nvSpPr>
+        <p:spPr>
+          <a:xfrm>
+            <a:off x="685800" y="2523744"/>
+            <a:ext cx="5120640" cy="1143000"/>
+          </a:xfrm>
+          <a:prstGeom prst="rect">
+            <a:avLst/>
+          </a:prstGeom>
+          <a:solidFill>
+            <a:srgbClr val="F4F4F7"/>
+          </a:solidFill>
+          <a:ln w="12700">
+            <a:solidFill>
+              <a:srgbClr val="BFBFBF"/>
+            </a:solidFill>
+          </a:ln>
+        </p:spPr>
+        <p:txBody>
+          <a:bodyPr wrap="square" lIns="146304" tIns="73152" rIns="146304" bIns="73152" anchor="t" rtlCol="0">
+            <a:noAutofit/>
+          </a:bodyPr>
+          <a:lstStyle/>
+          <a:p>
+            <a:pPr>
+              <a:spcBef>
+                <a:spcPts val="0"/>
+              </a:spcBef>
+            </a:pPr>
+            <a:r>
+              <a:rPr lang="en-US" sz="1300" dirty="0">
+                <a:solidFill>
+                  <a:srgbClr val="330662"/>
+                </a:solidFill>
+                <a:latin typeface="Consolas"/>
+                <a:cs typeface="Consolas"/>
+              </a:rPr>
+              <a:t>cd demos/timing/quad</a:t>
+            </a:r>
+            <a:endParaRPr lang="en-US" sz="1300" dirty="0"/>
+          </a:p>
+          <a:p>
+            <a:pPr>
+              <a:spcBef>
+                <a:spcPts val="600"/>
+              </a:spcBef>
+            </a:pPr>
+            <a:r>
+              <a:rPr lang="en-US" sz="1300" dirty="0">
+                <a:solidFill>
+                  <a:srgbClr val="330662"/>
+                </a:solidFill>
+                <a:latin typeface="Consolas"/>
+                <a:cs typeface="Consolas"/>
+              </a:rPr>
+              <a:t>python quad_build.py --list-steps</a:t>
+            </a:r>
+            <a:endParaRPr lang="en-US" sz="1300" dirty="0"/>
+          </a:p>
+          <a:p>
+            <a:pPr>
+              <a:spcBef>
+                <a:spcPts val="600"/>
+              </a:spcBef>
+            </a:pPr>
+            <a:r>
+              <a:rPr lang="en-US" sz="1300" dirty="0">
+                <a:solidFill>
+                  <a:srgbClr val="330662"/>
+                </a:solidFill>
+                <a:latin typeface="Consolas"/>
+                <a:cs typeface="Consolas"/>
+              </a:rPr>
+              <a:t>python quad_build.py --force-step sweep</a:t>
+            </a:r>
+            <a:endParaRPr lang="en-US" sz="1300" dirty="0"/>
+          </a:p>
+        </p:txBody>
+      </p:sp>
+      <p:sp>
+        <p:nvSpPr>
+          <p:cNvPr id="6" name="TextBox 6"/>
+          <p:cNvSpPr txBox="1"/>
+          <p:nvPr/>
+        </p:nvSpPr>
+        <p:spPr>
+          <a:xfrm>
+            <a:off x="685800" y="3840480"/>
+            <a:ext cx="5120640" cy="274320"/>
+          </a:xfrm>
+          <a:prstGeom prst="rect">
+            <a:avLst/>
+          </a:prstGeom>
+          <a:noFill/>
+        </p:spPr>
+        <p:txBody>
+          <a:bodyPr wrap="square" lIns="0" tIns="0" rIns="0" bIns="0" anchor="t" rtlCol="0">
+            <a:noAutofit/>
+          </a:bodyPr>
+          <a:lstStyle/>
+          <a:p>
+            <a:r>
+              <a:rPr lang="en-US" sz="1200" b="1" dirty="0">
+                <a:solidFill>
+                  <a:srgbClr val="6E6E6E"/>
+                </a:solidFill>
+              </a:rPr>
+              <a:t>WHAT TO WATCH FOR</a:t>
+            </a:r>
+            <a:endParaRPr lang="en-US" sz="1200" dirty="0"/>
+          </a:p>
+        </p:txBody>
+      </p:sp>
+      <p:sp>
+        <p:nvSpPr>
+          <p:cNvPr id="7" name="TextBox 7"/>
+          <p:cNvSpPr txBox="1"/>
+          <p:nvPr/>
+        </p:nvSpPr>
+        <p:spPr>
+          <a:xfrm>
+            <a:off x="685800" y="4133088"/>
+            <a:ext cx="5120640" cy="1737360"/>
+          </a:xfrm>
+          <a:prstGeom prst="rect">
+            <a:avLst/>
+          </a:prstGeom>
+          <a:noFill/>
+        </p:spPr>
+        <p:txBody>
+          <a:bodyPr wrap="square" lIns="0" tIns="0" rIns="0" bIns="0" anchor="t" rtlCol="0">
+            <a:noAutofit/>
+          </a:bodyPr>
+          <a:lstStyle/>
+          <a:p>
+            <a:pPr marL="237744" indent="-237744">
+              <a:spcBef>
+                <a:spcPts val="0"/>
+              </a:spcBef>
+              <a:buClr>
+                <a:srgbClr val="57068C"/>
+              </a:buClr>
+              <a:buSzPct val="70000"/>
+              <a:buFont typeface="Arial"/>
+              <a:buChar char="▪"/>
+            </a:pPr>
+            <a:r>
+              <a:rPr lang="en-US" sz="1400" dirty="0">
+                <a:solidFill>
+                  <a:srgbClr val="262626"/>
+                </a:solidFill>
+              </a:rPr>
+              <a:t xml:space="preserve">The quadratic with </a:t>
+            </a:r>
+            <a:r>
+              <a:rPr lang="en-US" sz="1400" b="1" dirty="0">
+                <a:solidFill>
+                  <a:srgbClr val="57068C"/>
+                </a:solidFill>
+              </a:rPr>
+              <a:t>no AXI</a:t>
+            </a:r>
+            <a:r>
+              <a:rPr lang="en-US" sz="1400" dirty="0">
+                <a:solidFill>
+                  <a:srgbClr val="262626"/>
+                </a:solidFill>
+              </a:rPr>
+              <a:t xml:space="preserve">: plain wires and </a:t>
+            </a:r>
+            <a:r>
+              <a:rPr lang="en-US" sz="1400" dirty="0">
+                <a:solidFill>
+                  <a:srgbClr val="330662"/>
+                </a:solidFill>
+                <a:latin typeface="Consolas"/>
+                <a:cs typeface="Consolas"/>
+              </a:rPr>
+              <a:t>ap_start</a:t>
+            </a:r>
+            <a:r>
+              <a:rPr lang="en-US" sz="1400" dirty="0">
+                <a:solidFill>
+                  <a:srgbClr val="262626"/>
+                </a:solidFill>
+              </a:rPr>
+              <a:t xml:space="preserve"> / </a:t>
+            </a:r>
+            <a:r>
+              <a:rPr lang="en-US" sz="1400" dirty="0">
+                <a:solidFill>
+                  <a:srgbClr val="330662"/>
+                </a:solidFill>
+                <a:latin typeface="Consolas"/>
+                <a:cs typeface="Consolas"/>
+              </a:rPr>
+              <a:t>ap_done</a:t>
+            </a:r>
+            <a:endParaRPr lang="en-US" sz="1400" dirty="0"/>
+          </a:p>
+          <a:p>
+            <a:pPr marL="237744" indent="-237744">
+              <a:spcBef>
+                <a:spcPts val="600"/>
+              </a:spcBef>
+              <a:buClr>
+                <a:srgbClr val="57068C"/>
+              </a:buClr>
+              <a:buSzPct val="70000"/>
+              <a:buFont typeface="Arial"/>
+              <a:buChar char="▪"/>
+            </a:pPr>
+            <a:r>
+              <a:rPr lang="en-US" sz="1400" dirty="0">
+                <a:solidFill>
+                  <a:srgbClr val="262626"/>
+                </a:solidFill>
+              </a:rPr>
+              <a:t xml:space="preserve">Latency: </a:t>
+            </a:r>
+            <a:r>
+              <a:rPr lang="en-US" sz="1400" b="1" dirty="0">
+                <a:solidFill>
+                  <a:srgbClr val="57068C"/>
+                </a:solidFill>
+              </a:rPr>
+              <a:t>0 cycles</a:t>
+            </a:r>
+            <a:r>
+              <a:rPr lang="en-US" sz="1400" dirty="0">
+                <a:solidFill>
+                  <a:srgbClr val="262626"/>
+                </a:solidFill>
+              </a:rPr>
+              <a:t xml:space="preserve"> at 50 MHz, 2 at 100 MHz, 9 at 300 MHz</a:t>
+            </a:r>
+            <a:endParaRPr lang="en-US" sz="1400" dirty="0"/>
+          </a:p>
+          <a:p>
+            <a:pPr marL="237744" indent="-237744">
+              <a:spcBef>
+                <a:spcPts val="600"/>
+              </a:spcBef>
+              <a:buClr>
+                <a:srgbClr val="57068C"/>
+              </a:buClr>
+              <a:buSzPct val="70000"/>
+              <a:buFont typeface="Arial"/>
+              <a:buChar char="▪"/>
+            </a:pPr>
+            <a:r>
+              <a:rPr lang="en-US" sz="1400" dirty="0">
+                <a:solidFill>
+                  <a:srgbClr val="262626"/>
+                </a:solidFill>
+              </a:rPr>
+              <a:t xml:space="preserve">In ns it does </a:t>
+            </a:r>
+            <a:r>
+              <a:rPr lang="en-US" sz="1400" b="1" dirty="0">
+                <a:solidFill>
+                  <a:srgbClr val="57068C"/>
+                </a:solidFill>
+              </a:rPr>
+              <a:t>not</a:t>
+            </a:r>
+            <a:r>
+              <a:rPr lang="en-US" sz="1400" dirty="0">
+                <a:solidFill>
+                  <a:srgbClr val="262626"/>
+                </a:solidFill>
+              </a:rPr>
+              <a:t xml:space="preserve"> fall: 20 ns at 100 MHz, 30 ns at 300 MHz</a:t>
+            </a:r>
+            <a:endParaRPr lang="en-US" sz="1400" dirty="0"/>
+          </a:p>
+          <a:p>
+            <a:pPr marL="237744" indent="-237744">
+              <a:spcBef>
+                <a:spcPts val="600"/>
+              </a:spcBef>
+              <a:buClr>
+                <a:srgbClr val="57068C"/>
+              </a:buClr>
+              <a:buSzPct val="70000"/>
+              <a:buFont typeface="Arial"/>
+              <a:buChar char="▪"/>
+            </a:pPr>
+            <a:r>
+              <a:rPr lang="en-US" sz="1400" dirty="0">
+                <a:solidFill>
+                  <a:srgbClr val="262626"/>
+                </a:solidFill>
+              </a:rPr>
+              <a:t xml:space="preserve">Fails timing at 400 MHz; pipelined, a new input </a:t>
+            </a:r>
+            <a:r>
+              <a:rPr lang="en-US" sz="1400" b="1" dirty="0">
+                <a:solidFill>
+                  <a:srgbClr val="57068C"/>
+                </a:solidFill>
+              </a:rPr>
+              <a:t>every cycle</a:t>
+            </a:r>
+            <a:endParaRPr lang="en-US" sz="1400" dirty="0"/>
+          </a:p>
+        </p:txBody>
+      </p:sp>
+      <p:pic>
+        <p:nvPicPr>
+          <p:cNvPr id="8" name="Picture 8" descr="quad_sweep"/>
+          <p:cNvPicPr>
+            <a:picLocks noChangeAspect="1"/>
+          </p:cNvPicPr>
+          <p:nvPr/>
+        </p:nvPicPr>
+        <p:blipFill>
+          <a:blip r:embed="rId2"/>
+          <a:stretch>
+            <a:fillRect/>
+          </a:stretch>
+        </p:blipFill>
+        <p:spPr>
+          <a:xfrm>
+            <a:off x="6126480" y="2252554"/>
+            <a:ext cx="5349240" cy="3532468"/>
+          </a:xfrm>
+          <a:prstGeom prst="rect">
+            <a:avLst/>
+          </a:prstGeom>
+        </p:spPr>
+      </p:pic>
+      <p:sp>
+        <p:nvSpPr>
+          <p:cNvPr id="9" name="Slide Number Placeholder 9"/>
+          <p:cNvSpPr>
+            <a:spLocks noGrp="1"/>
+          </p:cNvSpPr>
+          <p:nvPr>
+            <p:ph type="sldNum" sz="quarter" idx="12"/>
+          </p:nvPr>
+        </p:nvSpPr>
+        <p:spPr/>
+        <p:txBody>
+          <a:bodyPr/>
+          <a:lstStyle/>
+          <a:p>
+            <a:fld id="{629637A9-119A-49DA-BD12-AAC58B377D80}" type="slidenum">
+              <a:rPr lang="en-US" smtClean="0"/>
+              <a:t>‹#›</a:t>
+            </a:fld>
+            <a:endParaRPr lang="en-US" dirty="0"/>
+          </a:p>
+        </p:txBody>
+      </p:sp>
+    </p:spTree>
+  </p:cSld>
+  <p:clrMapOvr>
+    <a:masterClrMapping/>
+  </p:clrMapOvr>
+</p:sld>
+</file>
+
 <file path=ppt/slides/slide8.xml><?xml version="1.0" encoding="utf-8"?>
 <p:sld xmlns:a="http://schemas.openxmlformats.org/drawingml/2006/main" xmlns:r="http://schemas.openxmlformats.org/officeDocument/2006/relationships" xmlns:p="http://schemas.openxmlformats.org/presentationml/2006/main">
   <p:cSld>

--- a/units/unit06_timing/timing.pptx
+++ b/units/unit06_timing/timing.pptx
@@ -7889,7 +7889,7 @@
                   <a:srgbClr val="262626"/>
                 </a:solidFill>
               </a:rPr>
-              <a:t xml:space="preserve">	When does each of xsq, y and z become unknown (?), and when is it stable again at its new value?</a:t>
+              <a:t xml:space="preserve">	Draw the timing diagram of x, xsq, y and z from 0 to 25 ns: the unknown periods (?), the transition times and the values.</a:t>
             </a:r>
             <a:endParaRPr lang="en-US" sz="1700" dirty="0"/>
           </a:p>
@@ -8000,7 +8000,100 @@
       </p:sp>
       <p:sp>
         <p:nvSpPr>
-          <p:cNvPr id="7" name="TextBox 7"/>
+          <p:cNvPr id="7" name="Shape 7"/>
+          <p:cNvSpPr/>
+          <p:nvPr/>
+        </p:nvSpPr>
+        <p:spPr>
+          <a:xfrm>
+            <a:off x="7360920" y="3429000"/>
+            <a:ext cx="4114800" cy="1463040"/>
+          </a:xfrm>
+          <a:prstGeom prst="roundRect">
+            <a:avLst>
+              <a:gd name="adj" fmla="val 8000"/>
+            </a:avLst>
+          </a:prstGeom>
+          <a:solidFill>
+            <a:srgbClr val="F7F3FA"/>
+          </a:solidFill>
+          <a:ln w="12700">
+            <a:solidFill>
+              <a:srgbClr val="D5C4E3"/>
+            </a:solidFill>
+          </a:ln>
+        </p:spPr>
+        <p:txBody>
+          <a:bodyPr wrap="square" lIns="146304" tIns="73152" rIns="146304" bIns="73152" anchor="t" rtlCol="0">
+            <a:noAutofit/>
+          </a:bodyPr>
+          <a:lstStyle/>
+          <a:p>
+            <a:pPr>
+              <a:spcAft>
+                <a:spcPts val="400"/>
+              </a:spcAft>
+            </a:pPr>
+            <a:r>
+              <a:rPr lang="en-US" sz="1400" b="1" dirty="0">
+                <a:solidFill>
+                  <a:srgbClr val="57068C"/>
+                </a:solidFill>
+              </a:rPr>
+              <a:t>Drawing the diagram</a:t>
+            </a:r>
+            <a:endParaRPr lang="en-US" sz="1400" dirty="0"/>
+          </a:p>
+          <a:p>
+            <a:r>
+              <a:rPr lang="en-US" sz="1300" dirty="0">
+                <a:solidFill>
+                  <a:srgbClr val="262626"/>
+                </a:solidFill>
+              </a:rPr>
+              <a:t xml:space="preserve">By hand, or with waveflow's </a:t>
+            </a:r>
+            <a:r>
+              <a:rPr lang="en-US" sz="1300" dirty="0">
+                <a:solidFill>
+                  <a:srgbClr val="330662"/>
+                </a:solidFill>
+                <a:latin typeface="Consolas"/>
+                <a:cs typeface="Consolas"/>
+              </a:rPr>
+              <a:t>TimingDiagram</a:t>
+            </a:r>
+            <a:r>
+              <a:rPr lang="en-US" sz="1300" dirty="0">
+                <a:solidFill>
+                  <a:srgbClr val="262626"/>
+                </a:solidFill>
+              </a:rPr>
+              <a:t xml:space="preserve">: see the slide </a:t>
+            </a:r>
+            <a:r>
+              <a:rPr lang="en-US" sz="1300" b="1" dirty="0">
+                <a:solidFill>
+                  <a:srgbClr val="57068C"/>
+                </a:solidFill>
+              </a:rPr>
+              <a:t>Drawing Timing Diagrams in Python</a:t>
+            </a:r>
+            <a:r>
+              <a:rPr lang="en-US" sz="1300" dirty="0">
+                <a:solidFill>
+                  <a:srgbClr val="262626"/>
+                </a:solidFill>
+              </a:rPr>
+              <a:t>, where the value "x" draws an unknown period.</a:t>
+            </a:r>
+            <a:endParaRPr lang="en-US" sz="1300" dirty="0"/>
+          </a:p>
+        </p:txBody>
+      </p:sp>
+      <p:sp>
+        <p:nvSpPr>
+          <p:cNvPr id="8" name="TextBox 8"/>
           <p:cNvSpPr txBox="1"/>
           <p:nvPr/>
         </p:nvSpPr>
@@ -8034,7 +8127,7 @@
       </p:sp>
       <p:sp>
         <p:nvSpPr>
-          <p:cNvPr id="8" name="Slide Number Placeholder 8"/>
+          <p:cNvPr id="9" name="Slide Number Placeholder 9"/>
           <p:cNvSpPr>
             <a:spLocks noGrp="1"/>
           </p:cNvSpPr>
@@ -29779,7 +29872,7 @@
         <p:spPr>
           <a:xfrm>
             <a:off x="685800" y="1645920"/>
-            <a:ext cx="6035040" cy="3931920"/>
+            <a:ext cx="6126480" cy="3931920"/>
           </a:xfrm>
           <a:prstGeom prst="rect">
             <a:avLst/>
@@ -29794,45 +29887,82 @@
           <a:p>
             <a:pPr>
               <a:spcAft>
-                <a:spcPts val="800"/>
+                <a:spcPts val="600"/>
               </a:spcAft>
             </a:pPr>
             <a:r>
-              <a:rPr lang="en-US" sz="1800" dirty="0">
+              <a:rPr lang="en-US" sz="1700" dirty="0">
                 <a:solidFill>
                   <a:srgbClr val="262626"/>
                 </a:solidFill>
               </a:rPr>
               <a:t xml:space="preserve">A signal x is unknown before 10 ns.  It is 0 from 10 ns, 4 from 20 ns and 2 from 30 ns.</a:t>
             </a:r>
-            <a:endParaRPr lang="en-US" sz="1800" dirty="0"/>
+            <a:endParaRPr lang="en-US" sz="1700" dirty="0"/>
           </a:p>
           <a:p>
             <a:pPr>
               <a:spcAft>
-                <a:spcPts val="800"/>
+                <a:spcPts val="400"/>
               </a:spcAft>
             </a:pPr>
             <a:r>
-              <a:rPr lang="en-US" sz="1800" dirty="0">
+              <a:rPr lang="en-US" sz="1700" dirty="0">
                 <a:solidFill>
                   <a:srgbClr val="262626"/>
                 </a:solidFill>
               </a:rPr>
               <a:t>It passes through a circuit whose stable output is y = 2x + 1, with a propagation delay of 3 ns.</a:t>
             </a:r>
-            <a:endParaRPr lang="en-US" sz="1800" dirty="0"/>
-          </a:p>
-          <a:p>
-            <a:r>
-              <a:rPr lang="en-US" sz="1800" dirty="0">
-                <a:solidFill>
-                  <a:srgbClr val="262626"/>
-                </a:solidFill>
-              </a:rPr>
-              <a:t xml:space="preserve">List the times at which y changes and the value it takes at each.  Mark the periods where y is unknown, y = ?.</a:t>
-            </a:r>
-            <a:endParaRPr lang="en-US" sz="1800" dirty="0"/>
+            <a:endParaRPr lang="en-US" sz="1700" dirty="0"/>
+          </a:p>
+          <a:p>
+            <a:pPr marL="411480" indent="-411480">
+              <a:spcBef>
+                <a:spcPts val="900"/>
+              </a:spcBef>
+            </a:pPr>
+            <a:r>
+              <a:rPr lang="en-US" sz="1700" b="1" dirty="0">
+                <a:solidFill>
+                  <a:srgbClr val="57068C"/>
+                </a:solidFill>
+              </a:rPr>
+              <a:t>(a)</a:t>
+            </a:r>
+            <a:r>
+              <a:rPr lang="en-US" sz="1700" dirty="0">
+                <a:solidFill>
+                  <a:srgbClr val="262626"/>
+                </a:solidFill>
+              </a:rPr>
+              <a:t xml:space="preserve">	List the times at which y changes and the value it takes at each.  Mark the periods where y is unknown, y = ?.</a:t>
+            </a:r>
+            <a:endParaRPr lang="en-US" sz="1700" dirty="0"/>
+          </a:p>
+          <a:p>
+            <a:pPr marL="411480" indent="-411480">
+              <a:spcBef>
+                <a:spcPts val="900"/>
+              </a:spcBef>
+            </a:pPr>
+            <a:r>
+              <a:rPr lang="en-US" sz="1700" b="1" dirty="0">
+                <a:solidFill>
+                  <a:srgbClr val="57068C"/>
+                </a:solidFill>
+              </a:rPr>
+              <a:t>(b)</a:t>
+            </a:r>
+            <a:r>
+              <a:rPr lang="en-US" sz="1700" dirty="0">
+                <a:solidFill>
+                  <a:srgbClr val="262626"/>
+                </a:solidFill>
+              </a:rPr>
+              <a:t xml:space="preserve">	Draw the timing diagram of x and y from 0 to 40 ns: the unknown periods, the transition times and the values.</a:t>
+            </a:r>
+            <a:endParaRPr lang="en-US" sz="1700" dirty="0"/>
           </a:p>
         </p:txBody>
       </p:sp>
@@ -30248,7 +30378,100 @@
       </p:graphicFrame>
       <p:sp>
         <p:nvSpPr>
-          <p:cNvPr id="7" name="TextBox 7"/>
+          <p:cNvPr id="7" name="Shape 7"/>
+          <p:cNvSpPr/>
+          <p:nvPr/>
+        </p:nvSpPr>
+        <p:spPr>
+          <a:xfrm>
+            <a:off x="7178040" y="3246120"/>
+            <a:ext cx="4206240" cy="1463040"/>
+          </a:xfrm>
+          <a:prstGeom prst="roundRect">
+            <a:avLst>
+              <a:gd name="adj" fmla="val 8000"/>
+            </a:avLst>
+          </a:prstGeom>
+          <a:solidFill>
+            <a:srgbClr val="F7F3FA"/>
+          </a:solidFill>
+          <a:ln w="12700">
+            <a:solidFill>
+              <a:srgbClr val="D5C4E3"/>
+            </a:solidFill>
+          </a:ln>
+        </p:spPr>
+        <p:txBody>
+          <a:bodyPr wrap="square" lIns="146304" tIns="73152" rIns="146304" bIns="73152" anchor="t" rtlCol="0">
+            <a:noAutofit/>
+          </a:bodyPr>
+          <a:lstStyle/>
+          <a:p>
+            <a:pPr>
+              <a:spcAft>
+                <a:spcPts val="400"/>
+              </a:spcAft>
+            </a:pPr>
+            <a:r>
+              <a:rPr lang="en-US" sz="1400" b="1" dirty="0">
+                <a:solidFill>
+                  <a:srgbClr val="57068C"/>
+                </a:solidFill>
+              </a:rPr>
+              <a:t>Drawing the diagram</a:t>
+            </a:r>
+            <a:endParaRPr lang="en-US" sz="1400" dirty="0"/>
+          </a:p>
+          <a:p>
+            <a:r>
+              <a:rPr lang="en-US" sz="1300" dirty="0">
+                <a:solidFill>
+                  <a:srgbClr val="262626"/>
+                </a:solidFill>
+              </a:rPr>
+              <a:t xml:space="preserve">By hand, or with waveflow's </a:t>
+            </a:r>
+            <a:r>
+              <a:rPr lang="en-US" sz="1300" dirty="0">
+                <a:solidFill>
+                  <a:srgbClr val="330662"/>
+                </a:solidFill>
+                <a:latin typeface="Consolas"/>
+                <a:cs typeface="Consolas"/>
+              </a:rPr>
+              <a:t>TimingDiagram</a:t>
+            </a:r>
+            <a:r>
+              <a:rPr lang="en-US" sz="1300" dirty="0">
+                <a:solidFill>
+                  <a:srgbClr val="262626"/>
+                </a:solidFill>
+              </a:rPr>
+              <a:t xml:space="preserve">: see the slide </a:t>
+            </a:r>
+            <a:r>
+              <a:rPr lang="en-US" sz="1300" b="1" dirty="0">
+                <a:solidFill>
+                  <a:srgbClr val="57068C"/>
+                </a:solidFill>
+              </a:rPr>
+              <a:t>Drawing Timing Diagrams in Python</a:t>
+            </a:r>
+            <a:r>
+              <a:rPr lang="en-US" sz="1300" dirty="0">
+                <a:solidFill>
+                  <a:srgbClr val="262626"/>
+                </a:solidFill>
+              </a:rPr>
+              <a:t>, where the value "x" draws an unknown period.</a:t>
+            </a:r>
+            <a:endParaRPr lang="en-US" sz="1300" dirty="0"/>
+          </a:p>
+        </p:txBody>
+      </p:sp>
+      <p:sp>
+        <p:nvSpPr>
+          <p:cNvPr id="8" name="TextBox 8"/>
           <p:cNvSpPr txBox="1"/>
           <p:nvPr/>
         </p:nvSpPr>
@@ -30282,7 +30505,7 @@
       </p:sp>
       <p:sp>
         <p:nvSpPr>
-          <p:cNvPr id="8" name="Slide Number Placeholder 8"/>
+          <p:cNvPr id="9" name="Slide Number Placeholder 9"/>
           <p:cNvSpPr>
             <a:spLocks noGrp="1"/>
           </p:cNvSpPr>
@@ -30401,7 +30624,7 @@
         <p:spPr>
           <a:xfrm>
             <a:off x="685800" y="1600200"/>
-            <a:ext cx="5760720" cy="1280160"/>
+            <a:ext cx="5943600" cy="1005840"/>
           </a:xfrm>
           <a:prstGeom prst="rect">
             <a:avLst/>
@@ -30414,23 +30637,36 @@
           </a:bodyPr>
           <a:lstStyle/>
           <a:p>
-            <a:r>
-              <a:rPr lang="en-US" sz="1700" dirty="0">
-                <a:solidFill>
-                  <a:srgbClr val="262626"/>
-                </a:solidFill>
-              </a:rPr>
-              <a:t xml:space="preserve">After each change of x, y is unknown for 3 ns, then settles to 2x + 1: </a:t>
-            </a:r>
-            <a:r>
-              <a:rPr lang="en-US" sz="1700" b="1" dirty="0">
+            <a:pPr marL="411480" indent="-411480">
+              <a:spcBef>
+                <a:spcPts val="0"/>
+              </a:spcBef>
+            </a:pPr>
+            <a:r>
+              <a:rPr lang="en-US" sz="1600" b="1" dirty="0">
+                <a:solidFill>
+                  <a:srgbClr val="57068C"/>
+                </a:solidFill>
+              </a:rPr>
+              <a:t>(a)</a:t>
+            </a:r>
+            <a:r>
+              <a:rPr lang="en-US" sz="1600" dirty="0">
+                <a:solidFill>
+                  <a:srgbClr val="262626"/>
+                </a:solidFill>
+              </a:rPr>
+              <a:t xml:space="preserve">	After each change of x, y is unknown for 3 ns, then settles to 2x + 1: </a:t>
+            </a:r>
+            <a:r>
+              <a:rPr lang="en-US" sz="1600" b="1" dirty="0">
                 <a:solidFill>
                   <a:srgbClr val="00857C"/>
                 </a:solidFill>
               </a:rPr>
               <a:t>1, 9 and 5</a:t>
             </a:r>
-            <a:endParaRPr lang="en-US" sz="1700" dirty="0"/>
+            <a:endParaRPr lang="en-US" sz="1600" dirty="0"/>
           </a:p>
         </p:txBody>
       </p:sp>
@@ -30443,8 +30679,8 @@
           <p:nvPr/>
         </p:nvGraphicFramePr>
         <p:xfrm>
-          <a:off x="685800" y="2788920"/>
-          <a:ext cx="5806440" cy="877824"/>
+          <a:off x="1097280" y="2514600"/>
+          <a:ext cx="5486400" cy="768096"/>
         </p:xfrm>
         <a:graphic>
           <a:graphicData uri="http://schemas.openxmlformats.org/drawingml/2006/table">
@@ -30453,15 +30689,15 @@
                 <a:tableStyleId>{2D5ABB26-0587-4C30-8999-92F81FD0307C}</a:tableStyleId>
               </a:tblPr>
               <a:tblGrid>
-                <a:gridCol w="1143000"/>
-                <a:gridCol w="777240"/>
-                <a:gridCol w="777240"/>
-                <a:gridCol w="777240"/>
-                <a:gridCol w="777240"/>
-                <a:gridCol w="777240"/>
-                <a:gridCol w="777240"/>
+                <a:gridCol w="1097280"/>
+                <a:gridCol w="731520"/>
+                <a:gridCol w="731520"/>
+                <a:gridCol w="731520"/>
+                <a:gridCol w="731520"/>
+                <a:gridCol w="731520"/>
+                <a:gridCol w="731520"/>
               </a:tblGrid>
-              <a:tr h="438912">
+              <a:tr h="384048">
                 <a:tc>
                   <a:txBody>
                     <a:bodyPr/>
@@ -30469,14 +30705,14 @@
                     <a:p>
                       <a:pPr algn="ctr"/>
                       <a:r>
-                        <a:rPr lang="en-US" sz="1600" b="1" dirty="0">
+                        <a:rPr lang="en-US" sz="1500" b="1" dirty="0">
                           <a:solidFill>
                             <a:srgbClr val="FFFFFF"/>
                           </a:solidFill>
                         </a:rPr>
                         <a:t>Time [ns]</a:t>
                       </a:r>
-                      <a:endParaRPr lang="en-US" sz="1600" dirty="0"/>
+                      <a:endParaRPr lang="en-US" sz="1500" dirty="0"/>
                     </a:p>
                   </a:txBody>
                   <a:tcPr marL="73152" marR="54864" marT="27432" marB="27432" anchor="ctr">
@@ -30512,14 +30748,14 @@
                     <a:p>
                       <a:pPr algn="ctr"/>
                       <a:r>
-                        <a:rPr lang="en-US" sz="1600" b="1" dirty="0">
+                        <a:rPr lang="en-US" sz="1500" b="1" dirty="0">
                           <a:solidFill>
                             <a:srgbClr val="FFFFFF"/>
                           </a:solidFill>
                         </a:rPr>
                         <a:t>10</a:t>
                       </a:r>
-                      <a:endParaRPr lang="en-US" sz="1600" dirty="0"/>
+                      <a:endParaRPr lang="en-US" sz="1500" dirty="0"/>
                     </a:p>
                   </a:txBody>
                   <a:tcPr marL="73152" marR="54864" marT="27432" marB="27432" anchor="ctr">
@@ -30555,14 +30791,14 @@
                     <a:p>
                       <a:pPr algn="ctr"/>
                       <a:r>
-                        <a:rPr lang="en-US" sz="1600" b="1" dirty="0">
+                        <a:rPr lang="en-US" sz="1500" b="1" dirty="0">
                           <a:solidFill>
                             <a:srgbClr val="FFFFFF"/>
                           </a:solidFill>
                         </a:rPr>
                         <a:t>13</a:t>
                       </a:r>
-                      <a:endParaRPr lang="en-US" sz="1600" dirty="0"/>
+                      <a:endParaRPr lang="en-US" sz="1500" dirty="0"/>
                     </a:p>
                   </a:txBody>
                   <a:tcPr marL="73152" marR="54864" marT="27432" marB="27432" anchor="ctr">
@@ -30598,14 +30834,14 @@
                     <a:p>
                       <a:pPr algn="ctr"/>
                       <a:r>
-                        <a:rPr lang="en-US" sz="1600" b="1" dirty="0">
+                        <a:rPr lang="en-US" sz="1500" b="1" dirty="0">
                           <a:solidFill>
                             <a:srgbClr val="FFFFFF"/>
                           </a:solidFill>
                         </a:rPr>
                         <a:t>20</a:t>
                       </a:r>
-                      <a:endParaRPr lang="en-US" sz="1600" dirty="0"/>
+                      <a:endParaRPr lang="en-US" sz="1500" dirty="0"/>
                     </a:p>
                   </a:txBody>
                   <a:tcPr marL="73152" marR="54864" marT="27432" marB="27432" anchor="ctr">
@@ -30641,14 +30877,14 @@
                     <a:p>
                       <a:pPr algn="ctr"/>
                       <a:r>
-                        <a:rPr lang="en-US" sz="1600" b="1" dirty="0">
+                        <a:rPr lang="en-US" sz="1500" b="1" dirty="0">
                           <a:solidFill>
                             <a:srgbClr val="FFFFFF"/>
                           </a:solidFill>
                         </a:rPr>
                         <a:t>23</a:t>
                       </a:r>
-                      <a:endParaRPr lang="en-US" sz="1600" dirty="0"/>
+                      <a:endParaRPr lang="en-US" sz="1500" dirty="0"/>
                     </a:p>
                   </a:txBody>
                   <a:tcPr marL="73152" marR="54864" marT="27432" marB="27432" anchor="ctr">
@@ -30684,14 +30920,14 @@
                     <a:p>
                       <a:pPr algn="ctr"/>
                       <a:r>
-                        <a:rPr lang="en-US" sz="1600" b="1" dirty="0">
+                        <a:rPr lang="en-US" sz="1500" b="1" dirty="0">
                           <a:solidFill>
                             <a:srgbClr val="FFFFFF"/>
                           </a:solidFill>
                         </a:rPr>
                         <a:t>30</a:t>
                       </a:r>
-                      <a:endParaRPr lang="en-US" sz="1600" dirty="0"/>
+                      <a:endParaRPr lang="en-US" sz="1500" dirty="0"/>
                     </a:p>
                   </a:txBody>
                   <a:tcPr marL="73152" marR="54864" marT="27432" marB="27432" anchor="ctr">
@@ -30727,14 +30963,14 @@
                     <a:p>
                       <a:pPr algn="ctr"/>
                       <a:r>
-                        <a:rPr lang="en-US" sz="1600" b="1" dirty="0">
+                        <a:rPr lang="en-US" sz="1500" b="1" dirty="0">
                           <a:solidFill>
                             <a:srgbClr val="FFFFFF"/>
                           </a:solidFill>
                         </a:rPr>
                         <a:t>33</a:t>
                       </a:r>
-                      <a:endParaRPr lang="en-US" sz="1600" dirty="0"/>
+                      <a:endParaRPr lang="en-US" sz="1500" dirty="0"/>
                     </a:p>
                   </a:txBody>
                   <a:tcPr marL="73152" marR="54864" marT="27432" marB="27432" anchor="ctr">
@@ -30764,7 +31000,7 @@
                   </a:tcPr>
                 </a:tc>
               </a:tr>
-              <a:tr h="438912">
+              <a:tr h="384048">
                 <a:tc>
                   <a:txBody>
                     <a:bodyPr/>
@@ -30772,14 +31008,14 @@
                     <a:p>
                       <a:pPr algn="ctr"/>
                       <a:r>
-                        <a:rPr lang="en-US" sz="1600" dirty="0">
+                        <a:rPr lang="en-US" sz="1500" dirty="0">
                           <a:solidFill>
                             <a:srgbClr val="262626"/>
                           </a:solidFill>
                         </a:rPr>
                         <a:t>y</a:t>
                       </a:r>
-                      <a:endParaRPr lang="en-US" sz="1600" dirty="0"/>
+                      <a:endParaRPr lang="en-US" sz="1500" dirty="0"/>
                     </a:p>
                   </a:txBody>
                   <a:tcPr marL="73152" marR="54864" marT="27432" marB="27432" anchor="ctr">
@@ -30815,14 +31051,14 @@
                     <a:p>
                       <a:pPr algn="ctr"/>
                       <a:r>
-                        <a:rPr lang="en-US" sz="1600" dirty="0">
+                        <a:rPr lang="en-US" sz="1500" dirty="0">
                           <a:solidFill>
                             <a:srgbClr val="262626"/>
                           </a:solidFill>
                         </a:rPr>
                         <a:t>?</a:t>
                       </a:r>
-                      <a:endParaRPr lang="en-US" sz="1600" dirty="0"/>
+                      <a:endParaRPr lang="en-US" sz="1500" dirty="0"/>
                     </a:p>
                   </a:txBody>
                   <a:tcPr marL="73152" marR="54864" marT="27432" marB="27432" anchor="ctr">
@@ -30858,14 +31094,14 @@
                     <a:p>
                       <a:pPr algn="ctr"/>
                       <a:r>
-                        <a:rPr lang="en-US" sz="1600" dirty="0">
+                        <a:rPr lang="en-US" sz="1500" dirty="0">
                           <a:solidFill>
                             <a:srgbClr val="262626"/>
                           </a:solidFill>
                         </a:rPr>
                         <a:t>1</a:t>
                       </a:r>
-                      <a:endParaRPr lang="en-US" sz="1600" dirty="0"/>
+                      <a:endParaRPr lang="en-US" sz="1500" dirty="0"/>
                     </a:p>
                   </a:txBody>
                   <a:tcPr marL="73152" marR="54864" marT="27432" marB="27432" anchor="ctr">
@@ -30901,14 +31137,14 @@
                     <a:p>
                       <a:pPr algn="ctr"/>
                       <a:r>
-                        <a:rPr lang="en-US" sz="1600" dirty="0">
+                        <a:rPr lang="en-US" sz="1500" dirty="0">
                           <a:solidFill>
                             <a:srgbClr val="262626"/>
                           </a:solidFill>
                         </a:rPr>
                         <a:t>?</a:t>
                       </a:r>
-                      <a:endParaRPr lang="en-US" sz="1600" dirty="0"/>
+                      <a:endParaRPr lang="en-US" sz="1500" dirty="0"/>
                     </a:p>
                   </a:txBody>
                   <a:tcPr marL="73152" marR="54864" marT="27432" marB="27432" anchor="ctr">
@@ -30944,14 +31180,14 @@
                     <a:p>
                       <a:pPr algn="ctr"/>
                       <a:r>
-                        <a:rPr lang="en-US" sz="1600" dirty="0">
+                        <a:rPr lang="en-US" sz="1500" dirty="0">
                           <a:solidFill>
                             <a:srgbClr val="262626"/>
                           </a:solidFill>
                         </a:rPr>
                         <a:t>9</a:t>
                       </a:r>
-                      <a:endParaRPr lang="en-US" sz="1600" dirty="0"/>
+                      <a:endParaRPr lang="en-US" sz="1500" dirty="0"/>
                     </a:p>
                   </a:txBody>
                   <a:tcPr marL="73152" marR="54864" marT="27432" marB="27432" anchor="ctr">
@@ -30987,14 +31223,14 @@
                     <a:p>
                       <a:pPr algn="ctr"/>
                       <a:r>
-                        <a:rPr lang="en-US" sz="1600" dirty="0">
+                        <a:rPr lang="en-US" sz="1500" dirty="0">
                           <a:solidFill>
                             <a:srgbClr val="262626"/>
                           </a:solidFill>
                         </a:rPr>
                         <a:t>?</a:t>
                       </a:r>
-                      <a:endParaRPr lang="en-US" sz="1600" dirty="0"/>
+                      <a:endParaRPr lang="en-US" sz="1500" dirty="0"/>
                     </a:p>
                   </a:txBody>
                   <a:tcPr marL="73152" marR="54864" marT="27432" marB="27432" anchor="ctr">
@@ -31030,14 +31266,14 @@
                     <a:p>
                       <a:pPr algn="ctr"/>
                       <a:r>
-                        <a:rPr lang="en-US" sz="1600" dirty="0">
+                        <a:rPr lang="en-US" sz="1500" dirty="0">
                           <a:solidFill>
                             <a:srgbClr val="262626"/>
                           </a:solidFill>
                         </a:rPr>
                         <a:t>5</a:t>
                       </a:r>
-                      <a:endParaRPr lang="en-US" sz="1600" dirty="0"/>
+                      <a:endParaRPr lang="en-US" sz="1500" dirty="0"/>
                     </a:p>
                   </a:txBody>
                   <a:tcPr marL="73152" marR="54864" marT="27432" marB="27432" anchor="ctr">
@@ -31079,8 +31315,8 @@
         </p:nvSpPr>
         <p:spPr>
           <a:xfrm>
-            <a:off x="6903720" y="1645920"/>
-            <a:ext cx="4572000" cy="1600200"/>
+            <a:off x="6949440" y="1645920"/>
+            <a:ext cx="4526280" cy="1417320"/>
           </a:xfrm>
           <a:prstGeom prst="roundRect">
             <a:avLst>
@@ -31133,24 +31369,71 @@
           </a:p>
         </p:txBody>
       </p:sp>
+      <p:sp>
+        <p:nvSpPr>
+          <p:cNvPr id="7" name="TextBox 7"/>
+          <p:cNvSpPr txBox="1"/>
+          <p:nvPr/>
+        </p:nvSpPr>
+        <p:spPr>
+          <a:xfrm>
+            <a:off x="685800" y="3429000"/>
+            <a:ext cx="10789920" cy="457200"/>
+          </a:xfrm>
+          <a:prstGeom prst="rect">
+            <a:avLst/>
+          </a:prstGeom>
+          <a:noFill/>
+        </p:spPr>
+        <p:txBody>
+          <a:bodyPr wrap="square" lIns="0" tIns="0" rIns="0" bIns="0" anchor="t" rtlCol="0">
+            <a:noAutofit/>
+          </a:bodyPr>
+          <a:lstStyle/>
+          <a:p>
+            <a:pPr marL="411480" indent="-411480">
+              <a:spcBef>
+                <a:spcPts val="0"/>
+              </a:spcBef>
+            </a:pPr>
+            <a:r>
+              <a:rPr lang="en-US" sz="1600" b="1" dirty="0">
+                <a:solidFill>
+                  <a:srgbClr val="57068C"/>
+                </a:solidFill>
+              </a:rPr>
+              <a:t>(b)</a:t>
+            </a:r>
+            <a:r>
+              <a:rPr lang="en-US" sz="1600" dirty="0">
+                <a:solidFill>
+                  <a:srgbClr val="262626"/>
+                </a:solidFill>
+              </a:rPr>
+              <a:t xml:space="preserve">	The timing diagram: y goes unknown the moment x changes, and settles 3 ns later</a:t>
+            </a:r>
+            <a:endParaRPr lang="en-US" sz="1600" dirty="0"/>
+          </a:p>
+        </p:txBody>
+      </p:sp>
       <p:pic>
         <p:nvPicPr>
-          <p:cNvPr id="7" name="Picture 7" descr="q_propagation"/>
+          <p:cNvPr id="8" name="Picture 8" descr="q_propagation"/>
           <p:cNvPicPr>
             <a:picLocks noChangeAspect="1"/>
           </p:cNvPicPr>
           <p:nvPr/>
         </p:nvPicPr>
         <p:blipFill>
-          <a:blip r:embed="rId2"/>
+          <a:blip r:embed="rId3"/>
           <a:stretch>
             <a:fillRect/>
           </a:stretch>
         </p:blipFill>
         <p:spPr>
           <a:xfrm>
-            <a:off x="2027121" y="3794760"/>
-            <a:ext cx="8107279" cy="1783080"/>
+            <a:off x="2336800" y="3886200"/>
+            <a:ext cx="7899400" cy="1737360"/>
           </a:xfrm>
           <a:prstGeom prst="rect">
             <a:avLst/>
@@ -31159,7 +31442,7 @@
       </p:pic>
       <p:sp>
         <p:nvSpPr>
-          <p:cNvPr id="8" name="TextBox 8"/>
+          <p:cNvPr id="9" name="TextBox 9"/>
           <p:cNvSpPr txBox="1"/>
           <p:nvPr/>
         </p:nvSpPr>
@@ -31193,7 +31476,7 @@
       </p:sp>
       <p:sp>
         <p:nvSpPr>
-          <p:cNvPr id="9" name="Slide Number Placeholder 9"/>
+          <p:cNvPr id="10" name="Slide Number Placeholder 10"/>
           <p:cNvSpPr>
             <a:spLocks noGrp="1"/>
           </p:cNvSpPr>
@@ -31607,7 +31890,7 @@
                   <a:srgbClr val="262626"/>
                 </a:solidFill>
               </a:rPr>
-              <a:t xml:space="preserve">	All three go unknown at </a:t>
+              <a:t xml:space="preserve">	The timing diagram, right.  All three go unknown at </a:t>
             </a:r>
             <a:r>
               <a:rPr lang="en-US" sz="1600" b="1" dirty="0">
@@ -31623,7 +31906,7 @@
                   <a:srgbClr val="262626"/>
                 </a:solidFill>
               </a:rPr>
-              <a:t>, when x changes</a:t>
+              <a:t>, when x changes; x itself changes at once</a:t>
             </a:r>
             <a:endParaRPr lang="en-US" sz="1600" dirty="0"/>
           </a:p>
@@ -31733,8 +32016,8 @@
         </p:nvSpPr>
         <p:spPr>
           <a:xfrm>
-            <a:off x="685800" y="4343400"/>
-            <a:ext cx="5486400" cy="1188720"/>
+            <a:off x="685800" y="4434840"/>
+            <a:ext cx="5486400" cy="1097280"/>
           </a:xfrm>
           <a:prstGeom prst="roundRect">
             <a:avLst>
@@ -31796,7 +32079,7 @@
           <p:nvPr/>
         </p:nvPicPr>
         <p:blipFill>
-          <a:blip r:embed="rId2"/>
+          <a:blip r:embed="rId3"/>
           <a:stretch>
             <a:fillRect/>
           </a:stretch>
@@ -32062,7 +32345,7 @@
                   <a:srgbClr val="262626"/>
                 </a:solidFill>
               </a:rPr>
-              <a:t xml:space="preserve">	When does each of z1, z2 and y become unknown, and when is it stable again?</a:t>
+              <a:t xml:space="preserve">	Draw the timing diagram of x, z1, z2 and y from 0 to 20 ns: the unknown periods (?), the transition times and the values.</a:t>
             </a:r>
             <a:endParaRPr lang="en-US" sz="1600" dirty="0"/>
           </a:p>
@@ -32146,8 +32429,8 @@
           <p:nvPr/>
         </p:nvGraphicFramePr>
         <p:xfrm>
-          <a:off x="7360920" y="3017520"/>
-          <a:ext cx="4069080" cy="822960"/>
+          <a:off x="7360920" y="2926080"/>
+          <a:ext cx="4069080" cy="768096"/>
         </p:xfrm>
         <a:graphic>
           <a:graphicData uri="http://schemas.openxmlformats.org/drawingml/2006/table">
@@ -32161,7 +32444,7 @@
                 <a:gridCol w="960120"/>
                 <a:gridCol w="960120"/>
               </a:tblGrid>
-              <a:tr h="411480">
+              <a:tr h="384048">
                 <a:tc>
                   <a:txBody>
                     <a:bodyPr/>
@@ -32335,7 +32618,7 @@
                   </a:tcPr>
                 </a:tc>
               </a:tr>
-              <a:tr h="411480">
+              <a:tr h="384048">
                 <a:tc>
                   <a:txBody>
                     <a:bodyPr/>
@@ -32515,7 +32798,100 @@
       </p:graphicFrame>
       <p:sp>
         <p:nvSpPr>
-          <p:cNvPr id="7" name="TextBox 7"/>
+          <p:cNvPr id="7" name="Shape 7"/>
+          <p:cNvSpPr/>
+          <p:nvPr/>
+        </p:nvSpPr>
+        <p:spPr>
+          <a:xfrm>
+            <a:off x="7360920" y="3840480"/>
+            <a:ext cx="4114800" cy="1463040"/>
+          </a:xfrm>
+          <a:prstGeom prst="roundRect">
+            <a:avLst>
+              <a:gd name="adj" fmla="val 8000"/>
+            </a:avLst>
+          </a:prstGeom>
+          <a:solidFill>
+            <a:srgbClr val="F7F3FA"/>
+          </a:solidFill>
+          <a:ln w="12700">
+            <a:solidFill>
+              <a:srgbClr val="D5C4E3"/>
+            </a:solidFill>
+          </a:ln>
+        </p:spPr>
+        <p:txBody>
+          <a:bodyPr wrap="square" lIns="146304" tIns="73152" rIns="146304" bIns="73152" anchor="t" rtlCol="0">
+            <a:noAutofit/>
+          </a:bodyPr>
+          <a:lstStyle/>
+          <a:p>
+            <a:pPr>
+              <a:spcAft>
+                <a:spcPts val="400"/>
+              </a:spcAft>
+            </a:pPr>
+            <a:r>
+              <a:rPr lang="en-US" sz="1400" b="1" dirty="0">
+                <a:solidFill>
+                  <a:srgbClr val="57068C"/>
+                </a:solidFill>
+              </a:rPr>
+              <a:t>Drawing the diagram</a:t>
+            </a:r>
+            <a:endParaRPr lang="en-US" sz="1400" dirty="0"/>
+          </a:p>
+          <a:p>
+            <a:r>
+              <a:rPr lang="en-US" sz="1300" dirty="0">
+                <a:solidFill>
+                  <a:srgbClr val="262626"/>
+                </a:solidFill>
+              </a:rPr>
+              <a:t xml:space="preserve">By hand, or with waveflow's </a:t>
+            </a:r>
+            <a:r>
+              <a:rPr lang="en-US" sz="1300" dirty="0">
+                <a:solidFill>
+                  <a:srgbClr val="330662"/>
+                </a:solidFill>
+                <a:latin typeface="Consolas"/>
+                <a:cs typeface="Consolas"/>
+              </a:rPr>
+              <a:t>TimingDiagram</a:t>
+            </a:r>
+            <a:r>
+              <a:rPr lang="en-US" sz="1300" dirty="0">
+                <a:solidFill>
+                  <a:srgbClr val="262626"/>
+                </a:solidFill>
+              </a:rPr>
+              <a:t xml:space="preserve">: see the slide </a:t>
+            </a:r>
+            <a:r>
+              <a:rPr lang="en-US" sz="1300" b="1" dirty="0">
+                <a:solidFill>
+                  <a:srgbClr val="57068C"/>
+                </a:solidFill>
+              </a:rPr>
+              <a:t>Drawing Timing Diagrams in Python</a:t>
+            </a:r>
+            <a:r>
+              <a:rPr lang="en-US" sz="1300" dirty="0">
+                <a:solidFill>
+                  <a:srgbClr val="262626"/>
+                </a:solidFill>
+              </a:rPr>
+              <a:t>, where the value "x" draws an unknown period.</a:t>
+            </a:r>
+            <a:endParaRPr lang="en-US" sz="1300" dirty="0"/>
+          </a:p>
+        </p:txBody>
+      </p:sp>
+      <p:sp>
+        <p:nvSpPr>
+          <p:cNvPr id="8" name="TextBox 8"/>
           <p:cNvSpPr txBox="1"/>
           <p:nvPr/>
         </p:nvSpPr>
@@ -32549,7 +32925,7 @@
       </p:sp>
       <p:sp>
         <p:nvSpPr>
-          <p:cNvPr id="8" name="Slide Number Placeholder 8"/>
+          <p:cNvPr id="9" name="Slide Number Placeholder 9"/>
           <p:cNvSpPr>
             <a:spLocks noGrp="1"/>
           </p:cNvSpPr>
@@ -32756,7 +33132,7 @@
                   <a:srgbClr val="262626"/>
                 </a:solidFill>
               </a:rPr>
-              <a:t xml:space="preserve">	All go unknown at </a:t>
+              <a:t xml:space="preserve">	The timing diagram, right.  All go unknown at </a:t>
             </a:r>
             <a:r>
               <a:rPr lang="en-US" sz="1600" b="1" dirty="0">
@@ -32772,7 +33148,7 @@
                   <a:srgbClr val="262626"/>
                 </a:solidFill>
               </a:rPr>
-              <a:t xml:space="preserve">.  x settles at 12 ns, so:</a:t>
+              <a:t>; x settles at 12 ns, so:</a:t>
             </a:r>
             <a:endParaRPr lang="en-US" sz="1600" dirty="0"/>
           </a:p>
@@ -32929,7 +33305,7 @@
           <p:nvPr/>
         </p:nvPicPr>
         <p:blipFill>
-          <a:blip r:embed="rId2"/>
+          <a:blip r:embed="rId3"/>
           <a:stretch>
             <a:fillRect/>
           </a:stretch>
